--- a/docs/2026-2/cea055-estatistica-probabilidade/10-modelos-discretos-ii/arquivos/Aula_10_Modelos_Discretos_II_SITE.pptx
+++ b/docs/2026-2/cea055-estatistica-probabilidade/10-modelos-discretos-ii/arquivos/Aula_10_Modelos_Discretos_II_SITE.pptx
@@ -243,7 +243,7 @@
           <a:p>
             <a:fld id="{44623A65-BD25-40B6-8815-498297225DF7}" type="datetimeFigureOut">
               <a:rPr lang="pt-BR" smtClean="0"/>
-              <a:t>30/09/2026</a:t>
+              <a:t>22/10/2026</a:t>
             </a:fld>
             <a:endParaRPr lang="pt-BR" dirty="0"/>
           </a:p>
@@ -657,7 +657,7 @@
           <a:p>
             <a:fld id="{5B45E566-B383-4B2D-B951-1136FD38326E}" type="datetimeFigureOut">
               <a:rPr lang="pt-BR" smtClean="0"/>
-              <a:t>30/09/2026</a:t>
+              <a:t>22/10/2026</a:t>
             </a:fld>
             <a:endParaRPr lang="pt-BR" dirty="0"/>
           </a:p>
@@ -855,7 +855,7 @@
           <a:p>
             <a:fld id="{5B45E566-B383-4B2D-B951-1136FD38326E}" type="datetimeFigureOut">
               <a:rPr lang="pt-BR" smtClean="0"/>
-              <a:t>30/09/2026</a:t>
+              <a:t>22/10/2026</a:t>
             </a:fld>
             <a:endParaRPr lang="pt-BR" dirty="0"/>
           </a:p>
@@ -1063,7 +1063,7 @@
           <a:p>
             <a:fld id="{5B45E566-B383-4B2D-B951-1136FD38326E}" type="datetimeFigureOut">
               <a:rPr lang="pt-BR" smtClean="0"/>
-              <a:t>30/09/2026</a:t>
+              <a:t>22/10/2026</a:t>
             </a:fld>
             <a:endParaRPr lang="pt-BR" dirty="0"/>
           </a:p>
@@ -1261,7 +1261,7 @@
           <a:p>
             <a:fld id="{5B45E566-B383-4B2D-B951-1136FD38326E}" type="datetimeFigureOut">
               <a:rPr lang="pt-BR" smtClean="0"/>
-              <a:t>30/09/2026</a:t>
+              <a:t>22/10/2026</a:t>
             </a:fld>
             <a:endParaRPr lang="pt-BR" dirty="0"/>
           </a:p>
@@ -1536,7 +1536,7 @@
           <a:p>
             <a:fld id="{5B45E566-B383-4B2D-B951-1136FD38326E}" type="datetimeFigureOut">
               <a:rPr lang="pt-BR" smtClean="0"/>
-              <a:t>30/09/2026</a:t>
+              <a:t>22/10/2026</a:t>
             </a:fld>
             <a:endParaRPr lang="pt-BR" dirty="0"/>
           </a:p>
@@ -1801,7 +1801,7 @@
           <a:p>
             <a:fld id="{5B45E566-B383-4B2D-B951-1136FD38326E}" type="datetimeFigureOut">
               <a:rPr lang="pt-BR" smtClean="0"/>
-              <a:t>30/09/2026</a:t>
+              <a:t>22/10/2026</a:t>
             </a:fld>
             <a:endParaRPr lang="pt-BR" dirty="0"/>
           </a:p>
@@ -2213,7 +2213,7 @@
           <a:p>
             <a:fld id="{5B45E566-B383-4B2D-B951-1136FD38326E}" type="datetimeFigureOut">
               <a:rPr lang="pt-BR" smtClean="0"/>
-              <a:t>30/09/2026</a:t>
+              <a:t>22/10/2026</a:t>
             </a:fld>
             <a:endParaRPr lang="pt-BR" dirty="0"/>
           </a:p>
@@ -2354,7 +2354,7 @@
           <a:p>
             <a:fld id="{5B45E566-B383-4B2D-B951-1136FD38326E}" type="datetimeFigureOut">
               <a:rPr lang="pt-BR" smtClean="0"/>
-              <a:t>30/09/2026</a:t>
+              <a:t>22/10/2026</a:t>
             </a:fld>
             <a:endParaRPr lang="pt-BR" dirty="0"/>
           </a:p>
@@ -2467,7 +2467,7 @@
           <a:p>
             <a:fld id="{5B45E566-B383-4B2D-B951-1136FD38326E}" type="datetimeFigureOut">
               <a:rPr lang="pt-BR" smtClean="0"/>
-              <a:t>30/09/2026</a:t>
+              <a:t>22/10/2026</a:t>
             </a:fld>
             <a:endParaRPr lang="pt-BR" dirty="0"/>
           </a:p>
@@ -2778,7 +2778,7 @@
           <a:p>
             <a:fld id="{5B45E566-B383-4B2D-B951-1136FD38326E}" type="datetimeFigureOut">
               <a:rPr lang="pt-BR" smtClean="0"/>
-              <a:t>30/09/2026</a:t>
+              <a:t>22/10/2026</a:t>
             </a:fld>
             <a:endParaRPr lang="pt-BR" dirty="0"/>
           </a:p>
@@ -3066,7 +3066,7 @@
           <a:p>
             <a:fld id="{5B45E566-B383-4B2D-B951-1136FD38326E}" type="datetimeFigureOut">
               <a:rPr lang="pt-BR" smtClean="0"/>
-              <a:t>30/09/2026</a:t>
+              <a:t>22/10/2026</a:t>
             </a:fld>
             <a:endParaRPr lang="pt-BR" dirty="0"/>
           </a:p>
@@ -3331,7 +3331,7 @@
           <a:p>
             <a:fld id="{5B45E566-B383-4B2D-B951-1136FD38326E}" type="datetimeFigureOut">
               <a:rPr lang="pt-BR" smtClean="0"/>
-              <a:t>30/09/2026</a:t>
+              <a:t>22/10/2026</a:t>
             </a:fld>
             <a:endParaRPr lang="pt-BR" dirty="0"/>
           </a:p>
@@ -3908,15 +3908,23 @@
             </a:pPr>
             <a:r>
               <a:rPr lang="pt-BR" sz="2200" dirty="0"/>
-              <a:t>Montgomery, Runger. </a:t>
-            </a:r>
-            <a:r>
-              <a:rPr lang="pt-BR" sz="2200" b="1" dirty="0"/>
-              <a:t>Applied Statistics and Probability for Engineers</a:t>
+              <a:t>Montgomery, Runger</a:t>
+            </a:r>
+            <a:r>
+              <a:rPr lang="pt-BR" sz="2200"/>
+              <a:t>. </a:t>
+            </a:r>
+            <a:r>
+              <a:rPr lang="pt-BR" sz="2200" b="1"/>
+              <a:t>Estatística Aplicada e Probabilidade para Engenheiros</a:t>
+            </a:r>
+            <a:r>
+              <a:rPr lang="pt-BR" sz="2200"/>
+              <a:t>, 7ª ed. — </a:t>
             </a:r>
             <a:r>
               <a:rPr lang="pt-BR" sz="2200" dirty="0"/>
-              <a:t>, 7th ed — Cap. 3 (3.5, 3.7)</a:t>
+              <a:t>Cap. 3 (3.5, 3.7)</a:t>
             </a:r>
           </a:p>
           <a:p>
@@ -4437,8 +4445,8 @@
           </a:p>
         </p:txBody>
       </p:sp>
-      <mc:AlternateContent xmlns:mc="http://schemas.openxmlformats.org/markup-compatibility/2006">
-        <mc:Choice xmlns:a14="http://schemas.microsoft.com/office/drawing/2010/main" Requires="a14">
+      <mc:AlternateContent xmlns:mc="http://schemas.openxmlformats.org/markup-compatibility/2006" xmlns:a14="http://schemas.microsoft.com/office/drawing/2010/main">
+        <mc:Choice Requires="a14">
           <p:sp>
             <p:nvSpPr>
               <p:cNvPr id="11" name="CaixaDeTexto 10">
@@ -4845,7 +4853,7 @@
             </p:txBody>
           </p:sp>
         </mc:Choice>
-        <mc:Fallback>
+        <mc:Fallback xmlns="">
           <p:sp>
             <p:nvSpPr>
               <p:cNvPr id="11" name="CaixaDeTexto 10">
